--- a/Do An/slide-bao-cao-proposal.pptx
+++ b/Do An/slide-bao-cao-proposal.pptx
@@ -25,6 +25,7 @@
     <p:sldId id="273" r:id="rId25"/>
     <p:sldId id="274" r:id="rId26"/>
     <p:sldId id="275" r:id="rId27"/>
+    <p:sldId id="276" r:id="rId28"/>
   </p:sldIdLst>
   <p:sldSz cx="12191695" cy="6858000" type="screen4x3"/>
   <p:notesSz cx="6858000" cy="9144000"/>
@@ -617,6 +618,76 @@
 </file>
 
 <file path=ppt/notesSlides/notesSlide3.xml><?xml version="1.0" encoding="utf-8"?>
+<p:notes xmlns:a="http://schemas.openxmlformats.org/drawingml/2006/main" xmlns:p="http://schemas.openxmlformats.org/presentationml/2006/main" xmlns:r="http://schemas.openxmlformats.org/officeDocument/2006/relationships">
+  <p:cSld>
+    <p:spTree>
+      <p:nvGrpSpPr>
+        <p:cNvPr id="1" name=""/>
+        <p:cNvGrpSpPr/>
+        <p:nvPr/>
+      </p:nvGrpSpPr>
+      <p:grpSpPr>
+        <a:xfrm>
+          <a:off x="0" y="0"/>
+          <a:ext cx="0" cy="0"/>
+          <a:chOff x="0" y="0"/>
+          <a:chExt cx="0" cy="0"/>
+        </a:xfrm>
+      </p:grpSpPr>
+      <p:sp>
+        <p:nvSpPr>
+          <p:cNvPr id="2" name="Slide Image Placeholder 1"/>
+          <p:cNvSpPr>
+            <a:spLocks noGrp="1"/>
+          </p:cNvSpPr>
+          <p:nvPr>
+            <p:ph type="sldImg" idx="2"/>
+          </p:nvPr>
+        </p:nvSpPr>
+        <p:spPr/>
+      </p:sp>
+      <p:sp>
+        <p:nvSpPr>
+          <p:cNvPr id="3" name="Notes Placeholder 2"/>
+          <p:cNvSpPr>
+            <a:spLocks noGrp="1"/>
+          </p:cNvSpPr>
+          <p:nvPr>
+            <p:ph type="body" idx="3" sz="quarter"/>
+          </p:nvPr>
+        </p:nvSpPr>
+        <p:spPr/>
+        <p:txBody>
+          <a:bodyPr/>
+          <a:lstStyle/>
+          <a:p>
+            <a:r>
+              <a:t>đóng góp là giữ nhiều nguồn trên một chủ thể, và không nhận câu không có trong nguồn. Chưa phải chatbot.</a:t>
+            </a:r>
+          </a:p>
+        </p:txBody>
+      </p:sp>
+      <p:sp>
+        <p:nvSpPr>
+          <p:cNvPr id="4" name="Slide Number Placeholder 3"/>
+          <p:cNvSpPr>
+            <a:spLocks noGrp="1"/>
+          </p:cNvSpPr>
+          <p:nvPr>
+            <p:ph type="sldNum" idx="5" sz="quarter"/>
+          </p:nvPr>
+        </p:nvSpPr>
+        <p:spPr/>
+      </p:sp>
+    </p:spTree>
+  </p:cSld>
+  <p:clrMapOvr>
+    <a:masterClrMapping/>
+  </p:clrMapOvr>
+</p:notes>
+</file>
+
+<file path=ppt/notesSlides/notesSlide4.xml><?xml version="1.0" encoding="utf-8"?>
 <p:notes xmlns:a="http://schemas.openxmlformats.org/drawingml/2006/main" xmlns:p="http://schemas.openxmlformats.org/presentationml/2006/main" xmlns:r="http://schemas.openxmlformats.org/officeDocument/2006/relationships">
   <p:cSld>
     <p:spTree>
@@ -3773,7 +3844,7 @@
                 <a:ea typeface="Arial"/>
                 <a:cs typeface="Arial"/>
               </a:rPr>
-              <a:t>Xây dựng kho sử liệu có dẫn nguồn bằng mạng lưới thực thể lịch sử, hướng tới hỗ trợ giáo dục Lịch sử phổ thông</a:t>
+              <a:t>Triển khai hệ thống CSDL đồ thị tri thức và thiết kế pipeline trích xuất mạng lưới thực thể lịch sử 5W1H bằng LLM</a:t>
             </a:r>
           </a:p>
         </p:txBody>
@@ -3807,7 +3878,7 @@
                 <a:ea typeface="Arial"/>
                 <a:cs typeface="Arial"/>
               </a:rPr>
-              <a:t>Building a Source-Grounded Historical Repository through a Network of Historical Entities to Support History Education in Vietnamese Schools</a:t>
+              <a:t>Implementing a Knowledge Graph Database System and Designing an LLM Pipeline to Extract a 5W1H Network of Historical Entities</a:t>
             </a:r>
           </a:p>
         </p:txBody>
@@ -3962,7 +4033,7 @@
                 <a:ea typeface="Arial"/>
                 <a:cs typeface="Arial"/>
               </a:rPr>
-              <a:t>1 / 20</a:t>
+              <a:t>1 / 21</a:t>
             </a:r>
           </a:p>
         </p:txBody>
@@ -4161,7 +4232,7 @@
                 <a:ea typeface="Arial"/>
                 <a:cs typeface="Arial"/>
               </a:rPr>
-              <a:t>10 / 20</a:t>
+              <a:t>10 / 21</a:t>
             </a:r>
           </a:p>
         </p:txBody>
@@ -4175,7 +4246,7 @@
         <p:spPr>
           <a:xfrm>
             <a:off x="438912" y="1024128"/>
-            <a:ext cx="11311128" cy="2761488"/>
+            <a:ext cx="11311128" cy="2452878"/>
           </a:xfrm>
           <a:prstGeom prst="rect">
             <a:avLst/>
@@ -4203,7 +4274,7 @@
                 <a:ea typeface="Arial"/>
                 <a:cs typeface="Arial"/>
               </a:rPr>
-              <a:t>• Khoảng trống: chưa có pipeline đo được theo đường văn bản sử tiếng Việt -&gt; bản ghi chủ thể và quan hệ (mỗi thực thể một mã) -&gt; knowledge graph. Gold set do người gắn nhãn dùng để đối chiếu.</a:t>
+              <a:t>• Khoảng trống: chưa có pipeline đo được từ văn bản sử tiếng Việt -&gt; bản ghi chủ thể đã xác lập quan hệ -&gt; knowledge graph. Gold set do con người gắn nhãn dùng để đối chiếu.</a:t>
             </a:r>
           </a:p>
           <a:p>
@@ -4396,7 +4467,7 @@
                 <a:ea typeface="Arial"/>
                 <a:cs typeface="Arial"/>
               </a:rPr>
-              <a:t>Mục tiêu đồ án</a:t>
+              <a:t>Tính mới và đóng góp</a:t>
             </a:r>
           </a:p>
         </p:txBody>
@@ -4465,7 +4536,442 @@
                 <a:ea typeface="Arial"/>
                 <a:cs typeface="Arial"/>
               </a:rPr>
-              <a:t>11 / 20</a:t>
+              <a:t>11 / 21</a:t>
+            </a:r>
+          </a:p>
+        </p:txBody>
+      </p:sp>
+      <p:sp>
+        <p:nvSpPr>
+          <p:cNvPr id="7" name="TextBox 6"/>
+          <p:cNvSpPr txBox="1"/>
+          <p:nvPr/>
+        </p:nvSpPr>
+        <p:spPr>
+          <a:xfrm>
+            <a:off x="438912" y="1024128"/>
+            <a:ext cx="5440680" cy="310896"/>
+          </a:xfrm>
+          <a:prstGeom prst="rect">
+            <a:avLst/>
+          </a:prstGeom>
+          <a:noFill/>
+        </p:spPr>
+        <p:txBody>
+          <a:bodyPr wrap="square" lIns="0" rIns="0" tIns="0" bIns="0"/>
+          <a:lstStyle/>
+          <a:p>
+            <a:r>
+              <a:rPr sz="1600" b="1" i="0">
+                <a:solidFill>
+                  <a:srgbClr val="1F3864"/>
+                </a:solidFill>
+                <a:latin typeface="Arial"/>
+                <a:ea typeface="Arial"/>
+                <a:cs typeface="Arial"/>
+              </a:rPr>
+              <a:t>Cách lưu trữ:</a:t>
+            </a:r>
+          </a:p>
+        </p:txBody>
+      </p:sp>
+      <p:sp>
+        <p:nvSpPr>
+          <p:cNvPr id="8" name="TextBox 7"/>
+          <p:cNvSpPr txBox="1"/>
+          <p:nvPr/>
+        </p:nvSpPr>
+        <p:spPr>
+          <a:xfrm>
+            <a:off x="438912" y="1335024"/>
+            <a:ext cx="5440680" cy="4901184"/>
+          </a:xfrm>
+          <a:prstGeom prst="rect">
+            <a:avLst/>
+          </a:prstGeom>
+          <a:noFill/>
+        </p:spPr>
+        <p:txBody>
+          <a:bodyPr wrap="square" lIns="0" rIns="0" tIns="0" bIns="0"/>
+          <a:lstStyle/>
+          <a:p>
+            <a:pPr algn="l">
+              <a:spcBef>
+                <a:spcPts val="0"/>
+              </a:spcBef>
+              <a:spcAft>
+                <a:spcPts val="800"/>
+              </a:spcAft>
+            </a:pPr>
+            <a:r>
+              <a:rPr sz="1600" b="0" i="0">
+                <a:solidFill>
+                  <a:srgbClr val="1A1A1A"/>
+                </a:solidFill>
+                <a:latin typeface="Arial"/>
+                <a:ea typeface="Arial"/>
+                <a:cs typeface="Arial"/>
+              </a:rPr>
+              <a:t>• Lưu theo từng chủ thể thay vì lưu theo từng file sách.</a:t>
+            </a:r>
+          </a:p>
+          <a:p>
+            <a:pPr algn="l">
+              <a:spcBef>
+                <a:spcPts val="0"/>
+              </a:spcBef>
+              <a:spcAft>
+                <a:spcPts val="800"/>
+              </a:spcAft>
+            </a:pPr>
+            <a:r>
+              <a:rPr sz="1600" b="0" i="0">
+                <a:solidFill>
+                  <a:srgbClr val="1A1A1A"/>
+                </a:solidFill>
+                <a:latin typeface="Arial"/>
+                <a:ea typeface="Arial"/>
+                <a:cs typeface="Arial"/>
+              </a:rPr>
+              <a:t>• Một chủ thể chỉ có một định danh trong database. Nhiều tên gọi vẫn là một chủ thể.</a:t>
+            </a:r>
+          </a:p>
+          <a:p>
+            <a:pPr algn="l">
+              <a:spcBef>
+                <a:spcPts val="0"/>
+              </a:spcBef>
+              <a:spcAft>
+                <a:spcPts val="800"/>
+              </a:spcAft>
+            </a:pPr>
+            <a:r>
+              <a:rPr sz="1600" b="0" i="0">
+                <a:solidFill>
+                  <a:srgbClr val="1A1A1A"/>
+                </a:solidFill>
+                <a:latin typeface="Arial"/>
+                <a:ea typeface="Arial"/>
+                <a:cs typeface="Arial"/>
+              </a:rPr>
+              <a:t>• Nếu nhiều đoạn sử liệu khác nhau cùng gắn vào chủ thể. Mỗi đoạn vẫn được giữ nguyên vẹn cùng với nguồn của mình thay vì gộp nội dung.</a:t>
+            </a:r>
+          </a:p>
+        </p:txBody>
+      </p:sp>
+      <p:sp>
+        <p:nvSpPr>
+          <p:cNvPr id="9" name="TextBox 8"/>
+          <p:cNvSpPr txBox="1"/>
+          <p:nvPr/>
+        </p:nvSpPr>
+        <p:spPr>
+          <a:xfrm>
+            <a:off x="6309360" y="1024128"/>
+            <a:ext cx="5440680" cy="310896"/>
+          </a:xfrm>
+          <a:prstGeom prst="rect">
+            <a:avLst/>
+          </a:prstGeom>
+          <a:noFill/>
+        </p:spPr>
+        <p:txBody>
+          <a:bodyPr wrap="square" lIns="0" rIns="0" tIns="0" bIns="0"/>
+          <a:lstStyle/>
+          <a:p>
+            <a:r>
+              <a:rPr sz="1600" b="1" i="0">
+                <a:solidFill>
+                  <a:srgbClr val="1F3864"/>
+                </a:solidFill>
+                <a:latin typeface="Arial"/>
+                <a:ea typeface="Arial"/>
+                <a:cs typeface="Arial"/>
+              </a:rPr>
+              <a:t>Pipeline trích xuất:</a:t>
+            </a:r>
+          </a:p>
+        </p:txBody>
+      </p:sp>
+      <p:sp>
+        <p:nvSpPr>
+          <p:cNvPr id="10" name="TextBox 9"/>
+          <p:cNvSpPr txBox="1"/>
+          <p:nvPr/>
+        </p:nvSpPr>
+        <p:spPr>
+          <a:xfrm>
+            <a:off x="6309360" y="1335024"/>
+            <a:ext cx="5440680" cy="4901184"/>
+          </a:xfrm>
+          <a:prstGeom prst="rect">
+            <a:avLst/>
+          </a:prstGeom>
+          <a:noFill/>
+        </p:spPr>
+        <p:txBody>
+          <a:bodyPr wrap="square" lIns="0" rIns="0" tIns="0" bIns="0"/>
+          <a:lstStyle/>
+          <a:p>
+            <a:pPr algn="l">
+              <a:spcBef>
+                <a:spcPts val="0"/>
+              </a:spcBef>
+              <a:spcAft>
+                <a:spcPts val="800"/>
+              </a:spcAft>
+            </a:pPr>
+            <a:r>
+              <a:rPr sz="1600" b="0" i="0">
+                <a:solidFill>
+                  <a:srgbClr val="1A1A1A"/>
+                </a:solidFill>
+                <a:latin typeface="Arial"/>
+                <a:ea typeface="Arial"/>
+                <a:cs typeface="Arial"/>
+              </a:rPr>
+              <a:t>• Chỉ lưu trữ thông tin nguồn có viết, và lưu kèm câu gốc.</a:t>
+            </a:r>
+          </a:p>
+          <a:p>
+            <a:pPr algn="l">
+              <a:spcBef>
+                <a:spcPts val="0"/>
+              </a:spcBef>
+              <a:spcAft>
+                <a:spcPts val="800"/>
+              </a:spcAft>
+            </a:pPr>
+            <a:r>
+              <a:rPr sz="1600" b="0" i="0">
+                <a:solidFill>
+                  <a:srgbClr val="1A1A1A"/>
+                </a:solidFill>
+                <a:latin typeface="Arial"/>
+                <a:ea typeface="Arial"/>
+                <a:cs typeface="Arial"/>
+              </a:rPr>
+              <a:t>• Xác định các đoạn sử liệu cùng chủ thể và gộp về chung một định danh.</a:t>
+            </a:r>
+          </a:p>
+          <a:p>
+            <a:pPr algn="l">
+              <a:spcBef>
+                <a:spcPts val="0"/>
+              </a:spcBef>
+              <a:spcAft>
+                <a:spcPts val="800"/>
+              </a:spcAft>
+            </a:pPr>
+            <a:r>
+              <a:rPr sz="1600" b="0" i="0">
+                <a:solidFill>
+                  <a:srgbClr val="1A1A1A"/>
+                </a:solidFill>
+                <a:latin typeface="Arial"/>
+                <a:ea typeface="Arial"/>
+                <a:cs typeface="Arial"/>
+              </a:rPr>
+              <a:t>• Hai nguồn không bị trộn thành một câu. Tránh việc gây ra ảo giác AI.</a:t>
+            </a:r>
+          </a:p>
+        </p:txBody>
+      </p:sp>
+    </p:spTree>
+  </p:cSld>
+  <p:clrMapOvr>
+    <a:masterClrMapping/>
+  </p:clrMapOvr>
+</p:sld>
+</file>
+
+<file path=ppt/slides/slide12.xml><?xml version="1.0" encoding="utf-8"?>
+<p:sld xmlns:a="http://schemas.openxmlformats.org/drawingml/2006/main" xmlns:p="http://schemas.openxmlformats.org/presentationml/2006/main" xmlns:r="http://schemas.openxmlformats.org/officeDocument/2006/relationships">
+  <p:cSld>
+    <p:spTree>
+      <p:nvGrpSpPr>
+        <p:cNvPr id="1" name=""/>
+        <p:cNvGrpSpPr/>
+        <p:nvPr/>
+      </p:nvGrpSpPr>
+      <p:grpSpPr/>
+      <p:sp>
+        <p:nvSpPr>
+          <p:cNvPr id="2" name="Rectangle 1"/>
+          <p:cNvSpPr/>
+          <p:nvPr/>
+        </p:nvSpPr>
+        <p:spPr>
+          <a:xfrm>
+            <a:off x="0" y="0"/>
+            <a:ext cx="12191695" cy="73152"/>
+          </a:xfrm>
+          <a:prstGeom prst="rect">
+            <a:avLst/>
+          </a:prstGeom>
+          <a:solidFill>
+            <a:srgbClr val="1F3864"/>
+          </a:solidFill>
+          <a:ln>
+            <a:noFill/>
+          </a:ln>
+        </p:spPr>
+        <p:style>
+          <a:lnRef idx="1">
+            <a:schemeClr val="accent1"/>
+          </a:lnRef>
+          <a:fillRef idx="3">
+            <a:schemeClr val="accent1"/>
+          </a:fillRef>
+          <a:effectRef idx="2">
+            <a:schemeClr val="accent1"/>
+          </a:effectRef>
+          <a:fontRef idx="minor">
+            <a:schemeClr val="lt1"/>
+          </a:fontRef>
+        </p:style>
+        <p:txBody>
+          <a:bodyPr rtlCol="0" anchor="ctr"/>
+          <a:lstStyle/>
+          <a:p>
+            <a:pPr algn="ctr"/>
+          </a:p>
+        </p:txBody>
+      </p:sp>
+      <p:sp>
+        <p:nvSpPr>
+          <p:cNvPr id="3" name="TextBox 2"/>
+          <p:cNvSpPr txBox="1"/>
+          <p:nvPr/>
+        </p:nvSpPr>
+        <p:spPr>
+          <a:xfrm>
+            <a:off x="6583680" y="146304"/>
+            <a:ext cx="5166360" cy="292608"/>
+          </a:xfrm>
+          <a:prstGeom prst="rect">
+            <a:avLst/>
+          </a:prstGeom>
+          <a:noFill/>
+        </p:spPr>
+        <p:txBody>
+          <a:bodyPr wrap="square" lIns="0" rIns="0" tIns="0" bIns="0"/>
+          <a:lstStyle/>
+          <a:p>
+            <a:pPr algn="r"/>
+            <a:r>
+              <a:rPr sz="1200" b="0" i="0">
+                <a:solidFill>
+                  <a:srgbClr val="1F3864"/>
+                </a:solidFill>
+                <a:latin typeface="Arial"/>
+                <a:ea typeface="Arial"/>
+                <a:cs typeface="Arial"/>
+              </a:rPr>
+              <a:t>Phần B · Đồ án</a:t>
+            </a:r>
+          </a:p>
+        </p:txBody>
+      </p:sp>
+      <p:sp>
+        <p:nvSpPr>
+          <p:cNvPr id="4" name="TextBox 3"/>
+          <p:cNvSpPr txBox="1"/>
+          <p:nvPr/>
+        </p:nvSpPr>
+        <p:spPr>
+          <a:xfrm>
+            <a:off x="438912" y="384048"/>
+            <a:ext cx="11311128" cy="566928"/>
+          </a:xfrm>
+          <a:prstGeom prst="rect">
+            <a:avLst/>
+          </a:prstGeom>
+          <a:noFill/>
+        </p:spPr>
+        <p:txBody>
+          <a:bodyPr wrap="square" lIns="0" rIns="0" tIns="0" bIns="0"/>
+          <a:lstStyle/>
+          <a:p>
+            <a:r>
+              <a:rPr sz="2600" b="1" i="0">
+                <a:solidFill>
+                  <a:srgbClr val="1F3864"/>
+                </a:solidFill>
+                <a:latin typeface="Arial"/>
+                <a:ea typeface="Arial"/>
+                <a:cs typeface="Arial"/>
+              </a:rPr>
+              <a:t>Mục tiêu đồ án</a:t>
+            </a:r>
+          </a:p>
+        </p:txBody>
+      </p:sp>
+      <p:sp>
+        <p:nvSpPr>
+          <p:cNvPr id="5" name="TextBox 4"/>
+          <p:cNvSpPr txBox="1"/>
+          <p:nvPr/>
+        </p:nvSpPr>
+        <p:spPr>
+          <a:xfrm>
+            <a:off x="438912" y="6446520"/>
+            <a:ext cx="8412480" cy="256032"/>
+          </a:xfrm>
+          <a:prstGeom prst="rect">
+            <a:avLst/>
+          </a:prstGeom>
+          <a:noFill/>
+        </p:spPr>
+        <p:txBody>
+          <a:bodyPr wrap="square" lIns="0" rIns="0" tIns="0" bIns="0"/>
+          <a:lstStyle/>
+          <a:p>
+            <a:r>
+              <a:rPr sz="1100" b="0" i="0">
+                <a:solidFill>
+                  <a:srgbClr val="5B6470"/>
+                </a:solidFill>
+                <a:latin typeface="Arial"/>
+                <a:ea typeface="Arial"/>
+                <a:cs typeface="Arial"/>
+              </a:rPr>
+              <a:t>Trần Việt Hoàng · Proposal đồ án</a:t>
+            </a:r>
+          </a:p>
+        </p:txBody>
+      </p:sp>
+      <p:sp>
+        <p:nvSpPr>
+          <p:cNvPr id="6" name="TextBox 5"/>
+          <p:cNvSpPr txBox="1"/>
+          <p:nvPr/>
+        </p:nvSpPr>
+        <p:spPr>
+          <a:xfrm>
+            <a:off x="10424160" y="6446520"/>
+            <a:ext cx="1325880" cy="256032"/>
+          </a:xfrm>
+          <a:prstGeom prst="rect">
+            <a:avLst/>
+          </a:prstGeom>
+          <a:noFill/>
+        </p:spPr>
+        <p:txBody>
+          <a:bodyPr wrap="square" lIns="0" rIns="0" tIns="0" bIns="0"/>
+          <a:lstStyle/>
+          <a:p>
+            <a:pPr algn="r"/>
+            <a:r>
+              <a:rPr sz="1100" b="0" i="0">
+                <a:solidFill>
+                  <a:srgbClr val="5B6470"/>
+                </a:solidFill>
+                <a:latin typeface="Arial"/>
+                <a:ea typeface="Arial"/>
+                <a:cs typeface="Arial"/>
+              </a:rPr>
+              <a:t>12 / 21</a:t>
             </a:r>
           </a:p>
         </p:txBody>
@@ -4489,9 +4995,9 @@
                 <a:tableStyleId>{5C22544A-7EE6-4342-B048-85BDC9FD1C3A}</a:tableStyleId>
               </a:tblPr>
               <a:tblGrid>
-                <a:gridCol w="1350977"/>
-                <a:gridCol w="1350977"/>
-                <a:gridCol w="8609172"/>
+                <a:gridCol w="1280722"/>
+                <a:gridCol w="1280722"/>
+                <a:gridCol w="8749682"/>
               </a:tblGrid>
               <a:tr h="384048">
                 <a:tc>
@@ -4713,7 +5219,7 @@
                           <a:ea typeface="Arial"/>
                           <a:cs typeface="Arial"/>
                         </a:rPr>
-                        <a:t>Bốn API, gold set, trích xuất, nạp graph, khử trùng lặp danh xưng</a:t>
+                        <a:t>Các API, pipeline trích xuất, khử trùng lặp danh xưng, nạp graph, demo</a:t>
                       </a:r>
                     </a:p>
                   </a:txBody>
@@ -4790,7 +5296,7 @@
                           <a:ea typeface="Arial"/>
                           <a:cs typeface="Arial"/>
                         </a:rPr>
-                        <a:t>Demo, đo trên test set, luận văn và slide</a:t>
+                        <a:t>Gold set do con người gắn nhãn; đo độ khớp F1 và precision trên test set; luận văn và slide</a:t>
                       </a:r>
                     </a:p>
                   </a:txBody>
@@ -4813,7 +5319,7 @@
 </p:sld>
 </file>
 
-<file path=ppt/slides/slide12.xml><?xml version="1.0" encoding="utf-8"?>
+<file path=ppt/slides/slide13.xml><?xml version="1.0" encoding="utf-8"?>
 <p:sld xmlns:a="http://schemas.openxmlformats.org/drawingml/2006/main" xmlns:p="http://schemas.openxmlformats.org/presentationml/2006/main" xmlns:r="http://schemas.openxmlformats.org/officeDocument/2006/relationships">
   <p:cSld>
     <p:spTree>
@@ -4999,7 +5505,7 @@
                 <a:ea typeface="Arial"/>
                 <a:cs typeface="Arial"/>
               </a:rPr>
-              <a:t>12 / 20</a:t>
+              <a:t>13 / 21</a:t>
             </a:r>
           </a:p>
         </p:txBody>
@@ -6247,7 +6753,7 @@
 </p:sld>
 </file>
 
-<file path=ppt/slides/slide13.xml><?xml version="1.0" encoding="utf-8"?>
+<file path=ppt/slides/slide14.xml><?xml version="1.0" encoding="utf-8"?>
 <p:sld xmlns:a="http://schemas.openxmlformats.org/drawingml/2006/main" xmlns:p="http://schemas.openxmlformats.org/presentationml/2006/main" xmlns:r="http://schemas.openxmlformats.org/officeDocument/2006/relationships">
   <p:cSld>
     <p:spTree>
@@ -6433,7 +6939,7 @@
                 <a:ea typeface="Arial"/>
                 <a:cs typeface="Arial"/>
               </a:rPr>
-              <a:t>13 / 20</a:t>
+              <a:t>14 / 21</a:t>
             </a:r>
           </a:p>
         </p:txBody>
@@ -7019,7 +7525,7 @@
 </p:sld>
 </file>
 
-<file path=ppt/slides/slide14.xml><?xml version="1.0" encoding="utf-8"?>
+<file path=ppt/slides/slide15.xml><?xml version="1.0" encoding="utf-8"?>
 <p:sld xmlns:a="http://schemas.openxmlformats.org/drawingml/2006/main" xmlns:p="http://schemas.openxmlformats.org/presentationml/2006/main" xmlns:r="http://schemas.openxmlformats.org/officeDocument/2006/relationships">
   <p:cSld>
     <p:spTree>
@@ -7205,7 +7711,7 @@
                 <a:ea typeface="Arial"/>
                 <a:cs typeface="Arial"/>
               </a:rPr>
-              <a:t>14 / 20</a:t>
+              <a:t>15 / 21</a:t>
             </a:r>
           </a:p>
         </p:txBody>
@@ -7395,310 +7901,6 @@
                 <a:cs typeface="Arial"/>
               </a:rPr>
               <a:t>• Ghi dị bản giữa hai nguồn để cuối Phase 1.</a:t>
-            </a:r>
-          </a:p>
-        </p:txBody>
-      </p:sp>
-    </p:spTree>
-  </p:cSld>
-  <p:clrMapOvr>
-    <a:masterClrMapping/>
-  </p:clrMapOvr>
-</p:sld>
-</file>
-
-<file path=ppt/slides/slide15.xml><?xml version="1.0" encoding="utf-8"?>
-<p:sld xmlns:a="http://schemas.openxmlformats.org/drawingml/2006/main" xmlns:p="http://schemas.openxmlformats.org/presentationml/2006/main" xmlns:r="http://schemas.openxmlformats.org/officeDocument/2006/relationships">
-  <p:cSld>
-    <p:spTree>
-      <p:nvGrpSpPr>
-        <p:cNvPr id="1" name=""/>
-        <p:cNvGrpSpPr/>
-        <p:nvPr/>
-      </p:nvGrpSpPr>
-      <p:grpSpPr/>
-      <p:sp>
-        <p:nvSpPr>
-          <p:cNvPr id="2" name="Rectangle 1"/>
-          <p:cNvSpPr/>
-          <p:nvPr/>
-        </p:nvSpPr>
-        <p:spPr>
-          <a:xfrm>
-            <a:off x="0" y="0"/>
-            <a:ext cx="12191695" cy="73152"/>
-          </a:xfrm>
-          <a:prstGeom prst="rect">
-            <a:avLst/>
-          </a:prstGeom>
-          <a:solidFill>
-            <a:srgbClr val="1F3864"/>
-          </a:solidFill>
-          <a:ln>
-            <a:noFill/>
-          </a:ln>
-        </p:spPr>
-        <p:style>
-          <a:lnRef idx="1">
-            <a:schemeClr val="accent1"/>
-          </a:lnRef>
-          <a:fillRef idx="3">
-            <a:schemeClr val="accent1"/>
-          </a:fillRef>
-          <a:effectRef idx="2">
-            <a:schemeClr val="accent1"/>
-          </a:effectRef>
-          <a:fontRef idx="minor">
-            <a:schemeClr val="lt1"/>
-          </a:fontRef>
-        </p:style>
-        <p:txBody>
-          <a:bodyPr rtlCol="0" anchor="ctr"/>
-          <a:lstStyle/>
-          <a:p>
-            <a:pPr algn="ctr"/>
-          </a:p>
-        </p:txBody>
-      </p:sp>
-      <p:sp>
-        <p:nvSpPr>
-          <p:cNvPr id="3" name="TextBox 2"/>
-          <p:cNvSpPr txBox="1"/>
-          <p:nvPr/>
-        </p:nvSpPr>
-        <p:spPr>
-          <a:xfrm>
-            <a:off x="6583680" y="146304"/>
-            <a:ext cx="5166360" cy="292608"/>
-          </a:xfrm>
-          <a:prstGeom prst="rect">
-            <a:avLst/>
-          </a:prstGeom>
-          <a:noFill/>
-        </p:spPr>
-        <p:txBody>
-          <a:bodyPr wrap="square" lIns="0" rIns="0" tIns="0" bIns="0"/>
-          <a:lstStyle/>
-          <a:p>
-            <a:pPr algn="r"/>
-            <a:r>
-              <a:rPr sz="1200" b="0" i="0">
-                <a:solidFill>
-                  <a:srgbClr val="1F3864"/>
-                </a:solidFill>
-                <a:latin typeface="Arial"/>
-                <a:ea typeface="Arial"/>
-                <a:cs typeface="Arial"/>
-              </a:rPr>
-              <a:t>Phần C · Giải pháp</a:t>
-            </a:r>
-          </a:p>
-        </p:txBody>
-      </p:sp>
-      <p:sp>
-        <p:nvSpPr>
-          <p:cNvPr id="4" name="TextBox 3"/>
-          <p:cNvSpPr txBox="1"/>
-          <p:nvPr/>
-        </p:nvSpPr>
-        <p:spPr>
-          <a:xfrm>
-            <a:off x="438912" y="384048"/>
-            <a:ext cx="11311128" cy="566928"/>
-          </a:xfrm>
-          <a:prstGeom prst="rect">
-            <a:avLst/>
-          </a:prstGeom>
-          <a:noFill/>
-        </p:spPr>
-        <p:txBody>
-          <a:bodyPr wrap="square" lIns="0" rIns="0" tIns="0" bIns="0"/>
-          <a:lstStyle/>
-          <a:p>
-            <a:r>
-              <a:rPr sz="2600" b="1" i="0">
-                <a:solidFill>
-                  <a:srgbClr val="1F3864"/>
-                </a:solidFill>
-                <a:latin typeface="Arial"/>
-                <a:ea typeface="Arial"/>
-                <a:cs typeface="Arial"/>
-              </a:rPr>
-              <a:t>Pipeline bốn bước</a:t>
-            </a:r>
-          </a:p>
-        </p:txBody>
-      </p:sp>
-      <p:sp>
-        <p:nvSpPr>
-          <p:cNvPr id="5" name="TextBox 4"/>
-          <p:cNvSpPr txBox="1"/>
-          <p:nvPr/>
-        </p:nvSpPr>
-        <p:spPr>
-          <a:xfrm>
-            <a:off x="438912" y="6446520"/>
-            <a:ext cx="8412480" cy="256032"/>
-          </a:xfrm>
-          <a:prstGeom prst="rect">
-            <a:avLst/>
-          </a:prstGeom>
-          <a:noFill/>
-        </p:spPr>
-        <p:txBody>
-          <a:bodyPr wrap="square" lIns="0" rIns="0" tIns="0" bIns="0"/>
-          <a:lstStyle/>
-          <a:p>
-            <a:r>
-              <a:rPr sz="1100" b="0" i="0">
-                <a:solidFill>
-                  <a:srgbClr val="5B6470"/>
-                </a:solidFill>
-                <a:latin typeface="Arial"/>
-                <a:ea typeface="Arial"/>
-                <a:cs typeface="Arial"/>
-              </a:rPr>
-              <a:t>Trần Việt Hoàng · Proposal đồ án</a:t>
-            </a:r>
-          </a:p>
-        </p:txBody>
-      </p:sp>
-      <p:sp>
-        <p:nvSpPr>
-          <p:cNvPr id="6" name="TextBox 5"/>
-          <p:cNvSpPr txBox="1"/>
-          <p:nvPr/>
-        </p:nvSpPr>
-        <p:spPr>
-          <a:xfrm>
-            <a:off x="10424160" y="6446520"/>
-            <a:ext cx="1325880" cy="256032"/>
-          </a:xfrm>
-          <a:prstGeom prst="rect">
-            <a:avLst/>
-          </a:prstGeom>
-          <a:noFill/>
-        </p:spPr>
-        <p:txBody>
-          <a:bodyPr wrap="square" lIns="0" rIns="0" tIns="0" bIns="0"/>
-          <a:lstStyle/>
-          <a:p>
-            <a:pPr algn="r"/>
-            <a:r>
-              <a:rPr sz="1100" b="0" i="0">
-                <a:solidFill>
-                  <a:srgbClr val="5B6470"/>
-                </a:solidFill>
-                <a:latin typeface="Arial"/>
-                <a:ea typeface="Arial"/>
-                <a:cs typeface="Arial"/>
-              </a:rPr>
-              <a:t>15 / 20</a:t>
-            </a:r>
-          </a:p>
-        </p:txBody>
-      </p:sp>
-      <p:sp>
-        <p:nvSpPr>
-          <p:cNvPr id="7" name="TextBox 6"/>
-          <p:cNvSpPr txBox="1"/>
-          <p:nvPr/>
-        </p:nvSpPr>
-        <p:spPr>
-          <a:xfrm>
-            <a:off x="438912" y="1024128"/>
-            <a:ext cx="11311128" cy="2452878"/>
-          </a:xfrm>
-          <a:prstGeom prst="rect">
-            <a:avLst/>
-          </a:prstGeom>
-          <a:noFill/>
-        </p:spPr>
-        <p:txBody>
-          <a:bodyPr wrap="square" lIns="0" rIns="0" tIns="0" bIns="0"/>
-          <a:lstStyle/>
-          <a:p>
-            <a:pPr algn="l">
-              <a:spcBef>
-                <a:spcPts val="0"/>
-              </a:spcBef>
-              <a:spcAft>
-                <a:spcPts val="800"/>
-              </a:spcAft>
-            </a:pPr>
-            <a:r>
-              <a:rPr sz="1800" b="0" i="0">
-                <a:solidFill>
-                  <a:srgbClr val="1A1A1A"/>
-                </a:solidFill>
-                <a:latin typeface="Arial"/>
-                <a:ea typeface="Arial"/>
-                <a:cs typeface="Arial"/>
-              </a:rPr>
-              <a:t>1. Tiếp nhận: lưu văn bản gốc kèm source_id và mã hash để không nhận trùng.</a:t>
-            </a:r>
-          </a:p>
-          <a:p>
-            <a:pPr algn="l">
-              <a:spcBef>
-                <a:spcPts val="0"/>
-              </a:spcBef>
-              <a:spcAft>
-                <a:spcPts val="800"/>
-              </a:spcAft>
-            </a:pPr>
-            <a:r>
-              <a:rPr sz="1800" b="0" i="0">
-                <a:solidFill>
-                  <a:srgbClr val="1A1A1A"/>
-                </a:solidFill>
-                <a:latin typeface="Arial"/>
-                <a:ea typeface="Arial"/>
-                <a:cs typeface="Arial"/>
-              </a:rPr>
-              <a:t>2. Trích xuất: LLM trả về bản ghi chủ thể và quan hệ theo schema, mỗi giá trị kèm đoạn trích và vị trí ký tự. Sai schema thì bị từ chối.</a:t>
-            </a:r>
-          </a:p>
-          <a:p>
-            <a:pPr algn="l">
-              <a:spcBef>
-                <a:spcPts val="0"/>
-              </a:spcBef>
-              <a:spcAft>
-                <a:spcPts val="800"/>
-              </a:spcAft>
-            </a:pPr>
-            <a:r>
-              <a:rPr sz="1800" b="0" i="0">
-                <a:solidFill>
-                  <a:srgbClr val="1A1A1A"/>
-                </a:solidFill>
-                <a:latin typeface="Arial"/>
-                <a:ea typeface="Arial"/>
-                <a:cs typeface="Arial"/>
-              </a:rPr>
-              <a:t>3. Khử trùng lặp danh xưng cho Person, Group, Place: tra entity_aliases trên PostgreSQL; chưa chắc thì đo string similarity (threshold khởi điểm khoảng 82%, tinh chỉnh trên dev set) và so embedding; dưới threshold thì FLAGGED. Mã mới do sequence cấp.</a:t>
-            </a:r>
-          </a:p>
-          <a:p>
-            <a:pPr algn="l">
-              <a:spcBef>
-                <a:spcPts val="0"/>
-              </a:spcBef>
-              <a:spcAft>
-                <a:spcPts val="800"/>
-              </a:spcAft>
-            </a:pPr>
-            <a:r>
-              <a:rPr sz="1800" b="0" i="0">
-                <a:solidFill>
-                  <a:srgbClr val="1A1A1A"/>
-                </a:solidFill>
-                <a:latin typeface="Arial"/>
-                <a:ea typeface="Arial"/>
-                <a:cs typeface="Arial"/>
-              </a:rPr>
-              <a:t>4. Nạp graph: nạp theo batch bằng MERGE trên mã đã cấp, cùng mã thì cập nhật, không nhân đôi.</a:t>
             </a:r>
           </a:p>
         </p:txBody>
@@ -7828,7 +8030,7 @@
                 <a:ea typeface="Arial"/>
                 <a:cs typeface="Arial"/>
               </a:rPr>
-              <a:t>Kiến trúc và công nghệ</a:t>
+              <a:t>Pipeline bốn bước</a:t>
             </a:r>
           </a:p>
         </p:txBody>
@@ -7897,7 +8099,311 @@
                 <a:ea typeface="Arial"/>
                 <a:cs typeface="Arial"/>
               </a:rPr>
-              <a:t>16 / 20</a:t>
+              <a:t>16 / 21</a:t>
+            </a:r>
+          </a:p>
+        </p:txBody>
+      </p:sp>
+      <p:sp>
+        <p:nvSpPr>
+          <p:cNvPr id="7" name="TextBox 6"/>
+          <p:cNvSpPr txBox="1"/>
+          <p:nvPr/>
+        </p:nvSpPr>
+        <p:spPr>
+          <a:xfrm>
+            <a:off x="438912" y="1024128"/>
+            <a:ext cx="11311128" cy="2452878"/>
+          </a:xfrm>
+          <a:prstGeom prst="rect">
+            <a:avLst/>
+          </a:prstGeom>
+          <a:noFill/>
+        </p:spPr>
+        <p:txBody>
+          <a:bodyPr wrap="square" lIns="0" rIns="0" tIns="0" bIns="0"/>
+          <a:lstStyle/>
+          <a:p>
+            <a:pPr algn="l">
+              <a:spcBef>
+                <a:spcPts val="0"/>
+              </a:spcBef>
+              <a:spcAft>
+                <a:spcPts val="800"/>
+              </a:spcAft>
+            </a:pPr>
+            <a:r>
+              <a:rPr sz="1800" b="0" i="0">
+                <a:solidFill>
+                  <a:srgbClr val="1A1A1A"/>
+                </a:solidFill>
+                <a:latin typeface="Arial"/>
+                <a:ea typeface="Arial"/>
+                <a:cs typeface="Arial"/>
+              </a:rPr>
+              <a:t>1. Tiếp nhận: lưu văn bản gốc kèm source_id và mã hash để không nhận trùng.</a:t>
+            </a:r>
+          </a:p>
+          <a:p>
+            <a:pPr algn="l">
+              <a:spcBef>
+                <a:spcPts val="0"/>
+              </a:spcBef>
+              <a:spcAft>
+                <a:spcPts val="800"/>
+              </a:spcAft>
+            </a:pPr>
+            <a:r>
+              <a:rPr sz="1800" b="0" i="0">
+                <a:solidFill>
+                  <a:srgbClr val="1A1A1A"/>
+                </a:solidFill>
+                <a:latin typeface="Arial"/>
+                <a:ea typeface="Arial"/>
+                <a:cs typeface="Arial"/>
+              </a:rPr>
+              <a:t>2. Trích xuất: LLM trả về bản ghi chủ thể và quan hệ theo schema, mỗi giá trị kèm đoạn trích và vị trí ký tự. Sai schema thì bị từ chối.</a:t>
+            </a:r>
+          </a:p>
+          <a:p>
+            <a:pPr algn="l">
+              <a:spcBef>
+                <a:spcPts val="0"/>
+              </a:spcBef>
+              <a:spcAft>
+                <a:spcPts val="800"/>
+              </a:spcAft>
+            </a:pPr>
+            <a:r>
+              <a:rPr sz="1800" b="0" i="0">
+                <a:solidFill>
+                  <a:srgbClr val="1A1A1A"/>
+                </a:solidFill>
+                <a:latin typeface="Arial"/>
+                <a:ea typeface="Arial"/>
+                <a:cs typeface="Arial"/>
+              </a:rPr>
+              <a:t>3. Khử trùng lặp danh xưng cho Person, Group, Place: tra entity_aliases trên PostgreSQL; chưa chắc thì đo string similarity (threshold khởi điểm khoảng 82%, tinh chỉnh trên dev set) và so embedding; dưới threshold thì FLAGGED. Mã mới do sequence cấp.</a:t>
+            </a:r>
+          </a:p>
+          <a:p>
+            <a:pPr algn="l">
+              <a:spcBef>
+                <a:spcPts val="0"/>
+              </a:spcBef>
+              <a:spcAft>
+                <a:spcPts val="800"/>
+              </a:spcAft>
+            </a:pPr>
+            <a:r>
+              <a:rPr sz="1800" b="0" i="0">
+                <a:solidFill>
+                  <a:srgbClr val="1A1A1A"/>
+                </a:solidFill>
+                <a:latin typeface="Arial"/>
+                <a:ea typeface="Arial"/>
+                <a:cs typeface="Arial"/>
+              </a:rPr>
+              <a:t>4. Nạp graph: nạp theo batch bằng MERGE trên mã đã cấp, cùng mã thì cập nhật, không nhân đôi.</a:t>
+            </a:r>
+          </a:p>
+        </p:txBody>
+      </p:sp>
+    </p:spTree>
+  </p:cSld>
+  <p:clrMapOvr>
+    <a:masterClrMapping/>
+  </p:clrMapOvr>
+</p:sld>
+</file>
+
+<file path=ppt/slides/slide17.xml><?xml version="1.0" encoding="utf-8"?>
+<p:sld xmlns:a="http://schemas.openxmlformats.org/drawingml/2006/main" xmlns:p="http://schemas.openxmlformats.org/presentationml/2006/main" xmlns:r="http://schemas.openxmlformats.org/officeDocument/2006/relationships">
+  <p:cSld>
+    <p:spTree>
+      <p:nvGrpSpPr>
+        <p:cNvPr id="1" name=""/>
+        <p:cNvGrpSpPr/>
+        <p:nvPr/>
+      </p:nvGrpSpPr>
+      <p:grpSpPr/>
+      <p:sp>
+        <p:nvSpPr>
+          <p:cNvPr id="2" name="Rectangle 1"/>
+          <p:cNvSpPr/>
+          <p:nvPr/>
+        </p:nvSpPr>
+        <p:spPr>
+          <a:xfrm>
+            <a:off x="0" y="0"/>
+            <a:ext cx="12191695" cy="73152"/>
+          </a:xfrm>
+          <a:prstGeom prst="rect">
+            <a:avLst/>
+          </a:prstGeom>
+          <a:solidFill>
+            <a:srgbClr val="1F3864"/>
+          </a:solidFill>
+          <a:ln>
+            <a:noFill/>
+          </a:ln>
+        </p:spPr>
+        <p:style>
+          <a:lnRef idx="1">
+            <a:schemeClr val="accent1"/>
+          </a:lnRef>
+          <a:fillRef idx="3">
+            <a:schemeClr val="accent1"/>
+          </a:fillRef>
+          <a:effectRef idx="2">
+            <a:schemeClr val="accent1"/>
+          </a:effectRef>
+          <a:fontRef idx="minor">
+            <a:schemeClr val="lt1"/>
+          </a:fontRef>
+        </p:style>
+        <p:txBody>
+          <a:bodyPr rtlCol="0" anchor="ctr"/>
+          <a:lstStyle/>
+          <a:p>
+            <a:pPr algn="ctr"/>
+          </a:p>
+        </p:txBody>
+      </p:sp>
+      <p:sp>
+        <p:nvSpPr>
+          <p:cNvPr id="3" name="TextBox 2"/>
+          <p:cNvSpPr txBox="1"/>
+          <p:nvPr/>
+        </p:nvSpPr>
+        <p:spPr>
+          <a:xfrm>
+            <a:off x="6583680" y="146304"/>
+            <a:ext cx="5166360" cy="292608"/>
+          </a:xfrm>
+          <a:prstGeom prst="rect">
+            <a:avLst/>
+          </a:prstGeom>
+          <a:noFill/>
+        </p:spPr>
+        <p:txBody>
+          <a:bodyPr wrap="square" lIns="0" rIns="0" tIns="0" bIns="0"/>
+          <a:lstStyle/>
+          <a:p>
+            <a:pPr algn="r"/>
+            <a:r>
+              <a:rPr sz="1200" b="0" i="0">
+                <a:solidFill>
+                  <a:srgbClr val="1F3864"/>
+                </a:solidFill>
+                <a:latin typeface="Arial"/>
+                <a:ea typeface="Arial"/>
+                <a:cs typeface="Arial"/>
+              </a:rPr>
+              <a:t>Phần C · Giải pháp</a:t>
+            </a:r>
+          </a:p>
+        </p:txBody>
+      </p:sp>
+      <p:sp>
+        <p:nvSpPr>
+          <p:cNvPr id="4" name="TextBox 3"/>
+          <p:cNvSpPr txBox="1"/>
+          <p:nvPr/>
+        </p:nvSpPr>
+        <p:spPr>
+          <a:xfrm>
+            <a:off x="438912" y="384048"/>
+            <a:ext cx="11311128" cy="566928"/>
+          </a:xfrm>
+          <a:prstGeom prst="rect">
+            <a:avLst/>
+          </a:prstGeom>
+          <a:noFill/>
+        </p:spPr>
+        <p:txBody>
+          <a:bodyPr wrap="square" lIns="0" rIns="0" tIns="0" bIns="0"/>
+          <a:lstStyle/>
+          <a:p>
+            <a:r>
+              <a:rPr sz="2600" b="1" i="0">
+                <a:solidFill>
+                  <a:srgbClr val="1F3864"/>
+                </a:solidFill>
+                <a:latin typeface="Arial"/>
+                <a:ea typeface="Arial"/>
+                <a:cs typeface="Arial"/>
+              </a:rPr>
+              <a:t>Kiến trúc và công nghệ</a:t>
+            </a:r>
+          </a:p>
+        </p:txBody>
+      </p:sp>
+      <p:sp>
+        <p:nvSpPr>
+          <p:cNvPr id="5" name="TextBox 4"/>
+          <p:cNvSpPr txBox="1"/>
+          <p:nvPr/>
+        </p:nvSpPr>
+        <p:spPr>
+          <a:xfrm>
+            <a:off x="438912" y="6446520"/>
+            <a:ext cx="8412480" cy="256032"/>
+          </a:xfrm>
+          <a:prstGeom prst="rect">
+            <a:avLst/>
+          </a:prstGeom>
+          <a:noFill/>
+        </p:spPr>
+        <p:txBody>
+          <a:bodyPr wrap="square" lIns="0" rIns="0" tIns="0" bIns="0"/>
+          <a:lstStyle/>
+          <a:p>
+            <a:r>
+              <a:rPr sz="1100" b="0" i="0">
+                <a:solidFill>
+                  <a:srgbClr val="5B6470"/>
+                </a:solidFill>
+                <a:latin typeface="Arial"/>
+                <a:ea typeface="Arial"/>
+                <a:cs typeface="Arial"/>
+              </a:rPr>
+              <a:t>Trần Việt Hoàng · Proposal đồ án</a:t>
+            </a:r>
+          </a:p>
+        </p:txBody>
+      </p:sp>
+      <p:sp>
+        <p:nvSpPr>
+          <p:cNvPr id="6" name="TextBox 5"/>
+          <p:cNvSpPr txBox="1"/>
+          <p:nvPr/>
+        </p:nvSpPr>
+        <p:spPr>
+          <a:xfrm>
+            <a:off x="10424160" y="6446520"/>
+            <a:ext cx="1325880" cy="256032"/>
+          </a:xfrm>
+          <a:prstGeom prst="rect">
+            <a:avLst/>
+          </a:prstGeom>
+          <a:noFill/>
+        </p:spPr>
+        <p:txBody>
+          <a:bodyPr wrap="square" lIns="0" rIns="0" tIns="0" bIns="0"/>
+          <a:lstStyle/>
+          <a:p>
+            <a:pPr algn="r"/>
+            <a:r>
+              <a:rPr sz="1100" b="0" i="0">
+                <a:solidFill>
+                  <a:srgbClr val="5B6470"/>
+                </a:solidFill>
+                <a:latin typeface="Arial"/>
+                <a:ea typeface="Arial"/>
+                <a:cs typeface="Arial"/>
+              </a:rPr>
+              <a:t>17 / 21</a:t>
             </a:r>
           </a:p>
         </p:txBody>
@@ -7921,9 +8427,9 @@
                 <a:tableStyleId>{5C22544A-7EE6-4342-B048-85BDC9FD1C3A}</a:tableStyleId>
               </a:tblPr>
               <a:tblGrid>
-                <a:gridCol w="2104395"/>
-                <a:gridCol w="4647207"/>
-                <a:gridCol w="4559524"/>
+                <a:gridCol w="2447930"/>
+                <a:gridCol w="4473804"/>
+                <a:gridCol w="4389392"/>
               </a:tblGrid>
               <a:tr h="384048">
                 <a:tc>
@@ -8249,7 +8755,7 @@
                           <a:ea typeface="Arial"/>
                           <a:cs typeface="Arial"/>
                         </a:rPr>
-                        <a:t>Sổ đăng bạ, nguồn và log</a:t>
+                        <a:t>Master registry, nguồn và log</a:t>
                       </a:r>
                     </a:p>
                   </a:txBody>
@@ -8630,7 +9136,7 @@
 </p:sld>
 </file>
 
-<file path=ppt/slides/slide17.xml><?xml version="1.0" encoding="utf-8"?>
+<file path=ppt/slides/slide18.xml><?xml version="1.0" encoding="utf-8"?>
 <p:sld xmlns:a="http://schemas.openxmlformats.org/drawingml/2006/main" xmlns:p="http://schemas.openxmlformats.org/presentationml/2006/main" xmlns:r="http://schemas.openxmlformats.org/officeDocument/2006/relationships">
   <p:cSld>
     <p:spTree>
@@ -8816,7 +9322,7 @@
                 <a:ea typeface="Arial"/>
                 <a:cs typeface="Arial"/>
               </a:rPr>
-              <a:t>17 / 20</a:t>
+              <a:t>18 / 21</a:t>
             </a:r>
           </a:p>
         </p:txBody>
@@ -9380,7 +9886,7 @@
 </p:sld>
 </file>
 
-<file path=ppt/slides/slide18.xml><?xml version="1.0" encoding="utf-8"?>
+<file path=ppt/slides/slide19.xml><?xml version="1.0" encoding="utf-8"?>
 <p:sld xmlns:a="http://schemas.openxmlformats.org/drawingml/2006/main" xmlns:p="http://schemas.openxmlformats.org/presentationml/2006/main" xmlns:r="http://schemas.openxmlformats.org/officeDocument/2006/relationships">
   <p:cSld>
     <p:spTree>
@@ -9566,7 +10072,7 @@
                 <a:ea typeface="Arial"/>
                 <a:cs typeface="Arial"/>
               </a:rPr>
-              <a:t>18 / 20</a:t>
+              <a:t>19 / 21</a:t>
             </a:r>
           </a:p>
         </p:txBody>
@@ -9992,7 +10498,7 @@
         <p:spPr>
           <a:xfrm>
             <a:off x="438912" y="3493007"/>
-            <a:ext cx="11311128" cy="1453896"/>
+            <a:ext cx="11311128" cy="2286000"/>
           </a:xfrm>
           <a:prstGeom prst="rect">
             <a:avLst/>
@@ -10012,7 +10518,7 @@
               </a:spcAft>
             </a:pPr>
             <a:r>
-              <a:rPr sz="1800" b="0" i="0">
+              <a:rPr sz="1600" b="0" i="0">
                 <a:solidFill>
                   <a:srgbClr val="1A1A1A"/>
                 </a:solidFill>
@@ -10020,7 +10526,7 @@
                 <a:ea typeface="Arial"/>
                 <a:cs typeface="Arial"/>
               </a:rPr>
-              <a:t>• Gold set do người gắn nhãn, không nhìn kết quả mô hình khi gắn. Tách dev set và test set; test set không dùng để tinh chỉnh.</a:t>
+              <a:t>• Các con số là đích đặt ra, chưa phải kết quả đã đo.</a:t>
             </a:r>
           </a:p>
           <a:p>
@@ -10033,7 +10539,7 @@
               </a:spcAft>
             </a:pPr>
             <a:r>
-              <a:rPr sz="1800" b="0" i="0">
+              <a:rPr sz="1600" b="0" i="0">
                 <a:solidFill>
                   <a:srgbClr val="1A1A1A"/>
                 </a:solidFill>
@@ -10041,7 +10547,7 @@
                 <a:ea typeface="Arial"/>
                 <a:cs typeface="Arial"/>
               </a:rPr>
-              <a:t>• Ca FLAGGED không tính vào mẫu số precision.</a:t>
+              <a:t>• Gold set do người gắn nhãn, không nhìn kết quả mô hình. Tách dev set và test set. Test set chỉ dùng một lần.</a:t>
             </a:r>
           </a:p>
           <a:p>
@@ -10054,7 +10560,7 @@
               </a:spcAft>
             </a:pPr>
             <a:r>
-              <a:rPr sz="1800" b="0" i="0">
+              <a:rPr sz="1600" b="0" i="0">
                 <a:solidFill>
                   <a:srgbClr val="1A1A1A"/>
                 </a:solidFill>
@@ -10062,263 +10568,9 @@
                 <a:ea typeface="Arial"/>
                 <a:cs typeface="Arial"/>
               </a:rPr>
-              <a:t>• Các con số là đích đặt ra, chưa phải kết quả đã đo.</a:t>
-            </a:r>
-          </a:p>
-        </p:txBody>
-      </p:sp>
-    </p:spTree>
-  </p:cSld>
-  <p:clrMapOvr>
-    <a:masterClrMapping/>
-  </p:clrMapOvr>
-</p:sld>
-</file>
-
-<file path=ppt/slides/slide19.xml><?xml version="1.0" encoding="utf-8"?>
-<p:sld xmlns:a="http://schemas.openxmlformats.org/drawingml/2006/main" xmlns:p="http://schemas.openxmlformats.org/presentationml/2006/main" xmlns:r="http://schemas.openxmlformats.org/officeDocument/2006/relationships">
-  <p:cSld>
-    <p:spTree>
-      <p:nvGrpSpPr>
-        <p:cNvPr id="1" name=""/>
-        <p:cNvGrpSpPr/>
-        <p:nvPr/>
-      </p:nvGrpSpPr>
-      <p:grpSpPr/>
-      <p:sp>
-        <p:nvSpPr>
-          <p:cNvPr id="2" name="Rectangle 1"/>
-          <p:cNvSpPr/>
-          <p:nvPr/>
-        </p:nvSpPr>
-        <p:spPr>
-          <a:xfrm>
-            <a:off x="0" y="0"/>
-            <a:ext cx="12191695" cy="73152"/>
-          </a:xfrm>
-          <a:prstGeom prst="rect">
-            <a:avLst/>
-          </a:prstGeom>
-          <a:solidFill>
-            <a:srgbClr val="1F3864"/>
-          </a:solidFill>
-          <a:ln>
-            <a:noFill/>
-          </a:ln>
-        </p:spPr>
-        <p:style>
-          <a:lnRef idx="1">
-            <a:schemeClr val="accent1"/>
-          </a:lnRef>
-          <a:fillRef idx="3">
-            <a:schemeClr val="accent1"/>
-          </a:fillRef>
-          <a:effectRef idx="2">
-            <a:schemeClr val="accent1"/>
-          </a:effectRef>
-          <a:fontRef idx="minor">
-            <a:schemeClr val="lt1"/>
-          </a:fontRef>
-        </p:style>
-        <p:txBody>
-          <a:bodyPr rtlCol="0" anchor="ctr"/>
-          <a:lstStyle/>
-          <a:p>
-            <a:pPr algn="ctr"/>
-          </a:p>
-        </p:txBody>
-      </p:sp>
-      <p:sp>
-        <p:nvSpPr>
-          <p:cNvPr id="3" name="TextBox 2"/>
-          <p:cNvSpPr txBox="1"/>
-          <p:nvPr/>
-        </p:nvSpPr>
-        <p:spPr>
-          <a:xfrm>
-            <a:off x="6583680" y="146304"/>
-            <a:ext cx="5166360" cy="292608"/>
-          </a:xfrm>
-          <a:prstGeom prst="rect">
-            <a:avLst/>
-          </a:prstGeom>
-          <a:noFill/>
-        </p:spPr>
-        <p:txBody>
-          <a:bodyPr wrap="square" lIns="0" rIns="0" tIns="0" bIns="0"/>
-          <a:lstStyle/>
-          <a:p>
-            <a:pPr algn="r"/>
-            <a:r>
-              <a:rPr sz="1200" b="0" i="0">
-                <a:solidFill>
-                  <a:srgbClr val="1F3864"/>
-                </a:solidFill>
-                <a:latin typeface="Arial"/>
-                <a:ea typeface="Arial"/>
-                <a:cs typeface="Arial"/>
-              </a:rPr>
-              <a:t>Phần D · Kế hoạch và đánh giá</a:t>
-            </a:r>
-          </a:p>
-        </p:txBody>
-      </p:sp>
-      <p:sp>
-        <p:nvSpPr>
-          <p:cNvPr id="4" name="TextBox 3"/>
-          <p:cNvSpPr txBox="1"/>
-          <p:nvPr/>
-        </p:nvSpPr>
-        <p:spPr>
-          <a:xfrm>
-            <a:off x="438912" y="384048"/>
-            <a:ext cx="11311128" cy="566928"/>
-          </a:xfrm>
-          <a:prstGeom prst="rect">
-            <a:avLst/>
-          </a:prstGeom>
-          <a:noFill/>
-        </p:spPr>
-        <p:txBody>
-          <a:bodyPr wrap="square" lIns="0" rIns="0" tIns="0" bIns="0"/>
-          <a:lstStyle/>
-          <a:p>
-            <a:r>
-              <a:rPr sz="2600" b="1" i="0">
-                <a:solidFill>
-                  <a:srgbClr val="1F3864"/>
-                </a:solidFill>
-                <a:latin typeface="Arial"/>
-                <a:ea typeface="Arial"/>
-                <a:cs typeface="Arial"/>
-              </a:rPr>
-              <a:t>Demo dự kiến và sản phẩm bàn giao</a:t>
-            </a:r>
-          </a:p>
-        </p:txBody>
-      </p:sp>
-      <p:sp>
-        <p:nvSpPr>
-          <p:cNvPr id="5" name="TextBox 4"/>
-          <p:cNvSpPr txBox="1"/>
-          <p:nvPr/>
-        </p:nvSpPr>
-        <p:spPr>
-          <a:xfrm>
-            <a:off x="438912" y="6446520"/>
-            <a:ext cx="8412480" cy="256032"/>
-          </a:xfrm>
-          <a:prstGeom prst="rect">
-            <a:avLst/>
-          </a:prstGeom>
-          <a:noFill/>
-        </p:spPr>
-        <p:txBody>
-          <a:bodyPr wrap="square" lIns="0" rIns="0" tIns="0" bIns="0"/>
-          <a:lstStyle/>
-          <a:p>
-            <a:r>
-              <a:rPr sz="1100" b="0" i="0">
-                <a:solidFill>
-                  <a:srgbClr val="5B6470"/>
-                </a:solidFill>
-                <a:latin typeface="Arial"/>
-                <a:ea typeface="Arial"/>
-                <a:cs typeface="Arial"/>
-              </a:rPr>
-              <a:t>Trần Việt Hoàng · Proposal đồ án</a:t>
-            </a:r>
-          </a:p>
-        </p:txBody>
-      </p:sp>
-      <p:sp>
-        <p:nvSpPr>
-          <p:cNvPr id="6" name="TextBox 5"/>
-          <p:cNvSpPr txBox="1"/>
-          <p:nvPr/>
-        </p:nvSpPr>
-        <p:spPr>
-          <a:xfrm>
-            <a:off x="10424160" y="6446520"/>
-            <a:ext cx="1325880" cy="256032"/>
-          </a:xfrm>
-          <a:prstGeom prst="rect">
-            <a:avLst/>
-          </a:prstGeom>
-          <a:noFill/>
-        </p:spPr>
-        <p:txBody>
-          <a:bodyPr wrap="square" lIns="0" rIns="0" tIns="0" bIns="0"/>
-          <a:lstStyle/>
-          <a:p>
-            <a:pPr algn="r"/>
-            <a:r>
-              <a:rPr sz="1100" b="0" i="0">
-                <a:solidFill>
-                  <a:srgbClr val="5B6470"/>
-                </a:solidFill>
-                <a:latin typeface="Arial"/>
-                <a:ea typeface="Arial"/>
-                <a:cs typeface="Arial"/>
-              </a:rPr>
-              <a:t>19 / 20</a:t>
-            </a:r>
-          </a:p>
-        </p:txBody>
-      </p:sp>
-      <p:sp>
-        <p:nvSpPr>
-          <p:cNvPr id="7" name="TextBox 6"/>
-          <p:cNvSpPr txBox="1"/>
-          <p:nvPr/>
-        </p:nvSpPr>
-        <p:spPr>
-          <a:xfrm>
-            <a:off x="438912" y="1024128"/>
-            <a:ext cx="5440680" cy="310896"/>
-          </a:xfrm>
-          <a:prstGeom prst="rect">
-            <a:avLst/>
-          </a:prstGeom>
-          <a:noFill/>
-        </p:spPr>
-        <p:txBody>
-          <a:bodyPr wrap="square" lIns="0" rIns="0" tIns="0" bIns="0"/>
-          <a:lstStyle/>
-          <a:p>
-            <a:r>
-              <a:rPr sz="1600" b="1" i="0">
-                <a:solidFill>
-                  <a:srgbClr val="1F3864"/>
-                </a:solidFill>
-                <a:latin typeface="Arial"/>
-                <a:ea typeface="Arial"/>
-                <a:cs typeface="Arial"/>
-              </a:rPr>
-              <a:t>Kịch bản demo khoảng ba phút:</a:t>
-            </a:r>
-          </a:p>
-        </p:txBody>
-      </p:sp>
-      <p:sp>
-        <p:nvSpPr>
-          <p:cNvPr id="8" name="TextBox 7"/>
-          <p:cNvSpPr txBox="1"/>
-          <p:nvPr/>
-        </p:nvSpPr>
-        <p:spPr>
-          <a:xfrm>
-            <a:off x="438912" y="1335024"/>
-            <a:ext cx="5440680" cy="4901184"/>
-          </a:xfrm>
-          <a:prstGeom prst="rect">
-            <a:avLst/>
-          </a:prstGeom>
-          <a:noFill/>
-        </p:spPr>
-        <p:txBody>
-          <a:bodyPr wrap="square" lIns="0" rIns="0" tIns="0" bIns="0"/>
-          <a:lstStyle/>
+              <a:t>• Khớp từ khóa khi cùng giá trị và có đúng đoạn trích. Thừa, thiếu và null được tính riêng. Báo riêng từng chủ thể.</a:t>
+            </a:r>
+          </a:p>
           <a:p>
             <a:pPr algn="l">
               <a:spcBef>
@@ -10337,7 +10589,7 @@
                 <a:ea typeface="Arial"/>
                 <a:cs typeface="Arial"/>
               </a:rPr>
-              <a:t>1. Mở graph đã có sẵn một số node Person.</a:t>
+              <a:t>• Precision chỉ tính ca hệ thống tự gộp. Ca FLAGGED không đưa vào mẫu số.</a:t>
             </a:r>
           </a:p>
           <a:p>
@@ -10358,188 +10610,7 @@
                 <a:ea typeface="Arial"/>
                 <a:cs typeface="Arial"/>
               </a:rPr>
-              <a:t>2. Dán một đoạn chữ mới chưa có trong kho.</a:t>
-            </a:r>
-          </a:p>
-          <a:p>
-            <a:pPr algn="l">
-              <a:spcBef>
-                <a:spcPts val="0"/>
-              </a:spcBef>
-              <a:spcAft>
-                <a:spcPts val="800"/>
-              </a:spcAft>
-            </a:pPr>
-            <a:r>
-              <a:rPr sz="1600" b="0" i="0">
-                <a:solidFill>
-                  <a:srgbClr val="1A1A1A"/>
-                </a:solidFill>
-                <a:latin typeface="Arial"/>
-                <a:ea typeface="Arial"/>
-                <a:cs typeface="Arial"/>
-              </a:rPr>
-              <a:t>3. Trích xuất và xem các bản ghi chủ thể cùng quan hệ, mỗi giá trị kèm đoạn trích.</a:t>
-            </a:r>
-          </a:p>
-          <a:p>
-            <a:pPr algn="l">
-              <a:spcBef>
-                <a:spcPts val="0"/>
-              </a:spcBef>
-              <a:spcAft>
-                <a:spcPts val="800"/>
-              </a:spcAft>
-            </a:pPr>
-            <a:r>
-              <a:rPr sz="1600" b="0" i="0">
-                <a:solidFill>
-                  <a:srgbClr val="1A1A1A"/>
-                </a:solidFill>
-                <a:latin typeface="Arial"/>
-                <a:ea typeface="Arial"/>
-                <a:cs typeface="Arial"/>
-              </a:rPr>
-              <a:t>4. Nạp graph: danh xưng đã có trong master registry đi vào đúng mã cũ, chủ thể mới và quan hệ mới thành nhánh mới.</a:t>
-            </a:r>
-          </a:p>
-          <a:p>
-            <a:pPr algn="l">
-              <a:spcBef>
-                <a:spcPts val="0"/>
-              </a:spcBef>
-              <a:spcAft>
-                <a:spcPts val="800"/>
-              </a:spcAft>
-            </a:pPr>
-            <a:r>
-              <a:rPr sz="1600" b="0" i="0">
-                <a:solidFill>
-                  <a:srgbClr val="1A1A1A"/>
-                </a:solidFill>
-                <a:latin typeface="Arial"/>
-                <a:ea typeface="Arial"/>
-                <a:cs typeface="Arial"/>
-              </a:rPr>
-              <a:t>5. Hiển thị độ khớp F1 theo từ khóa, theo quan hệ, và precision trên test set.</a:t>
-            </a:r>
-          </a:p>
-        </p:txBody>
-      </p:sp>
-      <p:sp>
-        <p:nvSpPr>
-          <p:cNvPr id="9" name="TextBox 8"/>
-          <p:cNvSpPr txBox="1"/>
-          <p:nvPr/>
-        </p:nvSpPr>
-        <p:spPr>
-          <a:xfrm>
-            <a:off x="6309360" y="1024128"/>
-            <a:ext cx="5440680" cy="310896"/>
-          </a:xfrm>
-          <a:prstGeom prst="rect">
-            <a:avLst/>
-          </a:prstGeom>
-          <a:noFill/>
-        </p:spPr>
-        <p:txBody>
-          <a:bodyPr wrap="square" lIns="0" rIns="0" tIns="0" bIns="0"/>
-          <a:lstStyle/>
-          <a:p>
-            <a:r>
-              <a:rPr sz="1600" b="1" i="0">
-                <a:solidFill>
-                  <a:srgbClr val="1F3864"/>
-                </a:solidFill>
-                <a:latin typeface="Arial"/>
-                <a:ea typeface="Arial"/>
-                <a:cs typeface="Arial"/>
-              </a:rPr>
-              <a:t>Bàn giao:</a:t>
-            </a:r>
-          </a:p>
-        </p:txBody>
-      </p:sp>
-      <p:sp>
-        <p:nvSpPr>
-          <p:cNvPr id="10" name="TextBox 9"/>
-          <p:cNvSpPr txBox="1"/>
-          <p:nvPr/>
-        </p:nvSpPr>
-        <p:spPr>
-          <a:xfrm>
-            <a:off x="6309360" y="1335024"/>
-            <a:ext cx="5440680" cy="4901184"/>
-          </a:xfrm>
-          <a:prstGeom prst="rect">
-            <a:avLst/>
-          </a:prstGeom>
-          <a:noFill/>
-        </p:spPr>
-        <p:txBody>
-          <a:bodyPr wrap="square" lIns="0" rIns="0" tIns="0" bIns="0"/>
-          <a:lstStyle/>
-          <a:p>
-            <a:pPr algn="l">
-              <a:spcBef>
-                <a:spcPts val="0"/>
-              </a:spcBef>
-              <a:spcAft>
-                <a:spcPts val="800"/>
-              </a:spcAft>
-            </a:pPr>
-            <a:r>
-              <a:rPr sz="1600" b="0" i="0">
-                <a:solidFill>
-                  <a:srgbClr val="1A1A1A"/>
-                </a:solidFill>
-                <a:latin typeface="Arial"/>
-                <a:ea typeface="Arial"/>
-                <a:cs typeface="Arial"/>
-              </a:rPr>
-              <a:t>• Source code chạy bằng Docker, tài liệu API.</a:t>
-            </a:r>
-          </a:p>
-          <a:p>
-            <a:pPr algn="l">
-              <a:spcBef>
-                <a:spcPts val="0"/>
-              </a:spcBef>
-              <a:spcAft>
-                <a:spcPts val="800"/>
-              </a:spcAft>
-            </a:pPr>
-            <a:r>
-              <a:rPr sz="1600" b="0" i="0">
-                <a:solidFill>
-                  <a:srgbClr val="1A1A1A"/>
-                </a:solidFill>
-                <a:latin typeface="Arial"/>
-                <a:ea typeface="Arial"/>
-                <a:cs typeface="Arial"/>
-              </a:rPr>
-              <a:t>• Neo4j đã nạp kho thí điểm, PostgreSQL giữ master registry, nguồn và log.</a:t>
-            </a:r>
-          </a:p>
-          <a:p>
-            <a:pPr algn="l">
-              <a:spcBef>
-                <a:spcPts val="0"/>
-              </a:spcBef>
-              <a:spcAft>
-                <a:spcPts val="800"/>
-              </a:spcAft>
-            </a:pPr>
-            <a:r>
-              <a:rPr sz="1600" b="0" i="0">
-                <a:solidFill>
-                  <a:srgbClr val="1A1A1A"/>
-                </a:solidFill>
-                <a:latin typeface="Arial"/>
-                <a:ea typeface="Arial"/>
-                <a:cs typeface="Arial"/>
-              </a:rPr>
-              <a:t>• Gold set khoảng 150 đến 200 đoạn sử liệu có nhãn, báo cáo số đo.</a:t>
+              <a:t>• Thời gian là trung bình trên test set, từ lúc nhận chữ đến JSON đúng schema.</a:t>
             </a:r>
           </a:p>
         </p:txBody>
@@ -10738,7 +10809,7 @@
                 <a:ea typeface="Arial"/>
                 <a:cs typeface="Arial"/>
               </a:rPr>
-              <a:t>2 / 20</a:t>
+              <a:t>2 / 21</a:t>
             </a:r>
           </a:p>
         </p:txBody>
@@ -10952,7 +11023,7 @@
                 <a:ea typeface="Arial"/>
                 <a:cs typeface="Arial"/>
               </a:rPr>
-              <a:t>Tóm tắt và hỏi đáp</a:t>
+              <a:t>Demo dự kiến và sản phẩm bàn giao</a:t>
             </a:r>
           </a:p>
         </p:txBody>
@@ -11021,7 +11092,7 @@
                 <a:ea typeface="Arial"/>
                 <a:cs typeface="Arial"/>
               </a:rPr>
-              <a:t>20 / 20</a:t>
+              <a:t>20 / 21</a:t>
             </a:r>
           </a:p>
         </p:txBody>
@@ -11035,7 +11106,41 @@
         <p:spPr>
           <a:xfrm>
             <a:off x="438912" y="1024128"/>
-            <a:ext cx="11311128" cy="2144268"/>
+            <a:ext cx="5440680" cy="310896"/>
+          </a:xfrm>
+          <a:prstGeom prst="rect">
+            <a:avLst/>
+          </a:prstGeom>
+          <a:noFill/>
+        </p:spPr>
+        <p:txBody>
+          <a:bodyPr wrap="square" lIns="0" rIns="0" tIns="0" bIns="0"/>
+          <a:lstStyle/>
+          <a:p>
+            <a:r>
+              <a:rPr sz="1600" b="1" i="0">
+                <a:solidFill>
+                  <a:srgbClr val="1F3864"/>
+                </a:solidFill>
+                <a:latin typeface="Arial"/>
+                <a:ea typeface="Arial"/>
+                <a:cs typeface="Arial"/>
+              </a:rPr>
+              <a:t>Kịch bản demo khoảng ba phút:</a:t>
+            </a:r>
+          </a:p>
+        </p:txBody>
+      </p:sp>
+      <p:sp>
+        <p:nvSpPr>
+          <p:cNvPr id="8" name="TextBox 7"/>
+          <p:cNvSpPr txBox="1"/>
+          <p:nvPr/>
+        </p:nvSpPr>
+        <p:spPr>
+          <a:xfrm>
+            <a:off x="438912" y="1335024"/>
+            <a:ext cx="5440680" cy="4901184"/>
           </a:xfrm>
           <a:prstGeom prst="rect">
             <a:avLst/>
@@ -11055,7 +11160,7 @@
               </a:spcAft>
             </a:pPr>
             <a:r>
-              <a:rPr sz="1800" b="0" i="0">
+              <a:rPr sz="1600" b="0" i="0">
                 <a:solidFill>
                   <a:srgbClr val="1A1A1A"/>
                 </a:solidFill>
@@ -11063,7 +11168,7 @@
                 <a:ea typeface="Arial"/>
                 <a:cs typeface="Arial"/>
               </a:rPr>
-              <a:t>• Dự án: kho sử liệu có dẫn nguồn, để người học hỏi và kiểm nguồn.</a:t>
+              <a:t>1. Mở graph đã có sẵn một số node Person.</a:t>
             </a:r>
           </a:p>
           <a:p>
@@ -11076,7 +11181,7 @@
               </a:spcAft>
             </a:pPr>
             <a:r>
-              <a:rPr sz="1800" b="0" i="0">
+              <a:rPr sz="1600" b="0" i="0">
                 <a:solidFill>
                   <a:srgbClr val="1A1A1A"/>
                 </a:solidFill>
@@ -11084,7 +11189,7 @@
                 <a:ea typeface="Arial"/>
                 <a:cs typeface="Arial"/>
               </a:rPr>
-              <a:t>• Đồ án: phần mở đầu, trích xuất văn bản sử thành bản ghi chủ thể và quan hệ, khử trùng lặp danh xưng, nạp vào knowledge graph, có số đo.</a:t>
+              <a:t>2. Dán một đoạn chữ mới chưa có trong kho.</a:t>
             </a:r>
           </a:p>
           <a:p>
@@ -11097,6 +11202,407 @@
               </a:spcAft>
             </a:pPr>
             <a:r>
+              <a:rPr sz="1600" b="0" i="0">
+                <a:solidFill>
+                  <a:srgbClr val="1A1A1A"/>
+                </a:solidFill>
+                <a:latin typeface="Arial"/>
+                <a:ea typeface="Arial"/>
+                <a:cs typeface="Arial"/>
+              </a:rPr>
+              <a:t>3. Trích xuất và xem các bản ghi chủ thể cùng quan hệ, mỗi giá trị kèm đoạn trích.</a:t>
+            </a:r>
+          </a:p>
+          <a:p>
+            <a:pPr algn="l">
+              <a:spcBef>
+                <a:spcPts val="0"/>
+              </a:spcBef>
+              <a:spcAft>
+                <a:spcPts val="800"/>
+              </a:spcAft>
+            </a:pPr>
+            <a:r>
+              <a:rPr sz="1600" b="0" i="0">
+                <a:solidFill>
+                  <a:srgbClr val="1A1A1A"/>
+                </a:solidFill>
+                <a:latin typeface="Arial"/>
+                <a:ea typeface="Arial"/>
+                <a:cs typeface="Arial"/>
+              </a:rPr>
+              <a:t>4. Nạp graph: danh xưng đã có trong master registry đi vào đúng mã cũ, chủ thể mới và quan hệ mới thành nhánh mới.</a:t>
+            </a:r>
+          </a:p>
+          <a:p>
+            <a:pPr algn="l">
+              <a:spcBef>
+                <a:spcPts val="0"/>
+              </a:spcBef>
+              <a:spcAft>
+                <a:spcPts val="800"/>
+              </a:spcAft>
+            </a:pPr>
+            <a:r>
+              <a:rPr sz="1600" b="0" i="0">
+                <a:solidFill>
+                  <a:srgbClr val="1A1A1A"/>
+                </a:solidFill>
+                <a:latin typeface="Arial"/>
+                <a:ea typeface="Arial"/>
+                <a:cs typeface="Arial"/>
+              </a:rPr>
+              <a:t>5. Hiển thị độ khớp F1 theo từ khóa, theo quan hệ, và precision trên test set.</a:t>
+            </a:r>
+          </a:p>
+        </p:txBody>
+      </p:sp>
+      <p:sp>
+        <p:nvSpPr>
+          <p:cNvPr id="9" name="TextBox 8"/>
+          <p:cNvSpPr txBox="1"/>
+          <p:nvPr/>
+        </p:nvSpPr>
+        <p:spPr>
+          <a:xfrm>
+            <a:off x="6309360" y="1024128"/>
+            <a:ext cx="5440680" cy="310896"/>
+          </a:xfrm>
+          <a:prstGeom prst="rect">
+            <a:avLst/>
+          </a:prstGeom>
+          <a:noFill/>
+        </p:spPr>
+        <p:txBody>
+          <a:bodyPr wrap="square" lIns="0" rIns="0" tIns="0" bIns="0"/>
+          <a:lstStyle/>
+          <a:p>
+            <a:r>
+              <a:rPr sz="1600" b="1" i="0">
+                <a:solidFill>
+                  <a:srgbClr val="1F3864"/>
+                </a:solidFill>
+                <a:latin typeface="Arial"/>
+                <a:ea typeface="Arial"/>
+                <a:cs typeface="Arial"/>
+              </a:rPr>
+              <a:t>Bàn giao:</a:t>
+            </a:r>
+          </a:p>
+        </p:txBody>
+      </p:sp>
+      <p:sp>
+        <p:nvSpPr>
+          <p:cNvPr id="10" name="TextBox 9"/>
+          <p:cNvSpPr txBox="1"/>
+          <p:nvPr/>
+        </p:nvSpPr>
+        <p:spPr>
+          <a:xfrm>
+            <a:off x="6309360" y="1335024"/>
+            <a:ext cx="5440680" cy="4901184"/>
+          </a:xfrm>
+          <a:prstGeom prst="rect">
+            <a:avLst/>
+          </a:prstGeom>
+          <a:noFill/>
+        </p:spPr>
+        <p:txBody>
+          <a:bodyPr wrap="square" lIns="0" rIns="0" tIns="0" bIns="0"/>
+          <a:lstStyle/>
+          <a:p>
+            <a:pPr algn="l">
+              <a:spcBef>
+                <a:spcPts val="0"/>
+              </a:spcBef>
+              <a:spcAft>
+                <a:spcPts val="800"/>
+              </a:spcAft>
+            </a:pPr>
+            <a:r>
+              <a:rPr sz="1600" b="0" i="0">
+                <a:solidFill>
+                  <a:srgbClr val="1A1A1A"/>
+                </a:solidFill>
+                <a:latin typeface="Arial"/>
+                <a:ea typeface="Arial"/>
+                <a:cs typeface="Arial"/>
+              </a:rPr>
+              <a:t>• Source code chạy bằng Docker, tài liệu API.</a:t>
+            </a:r>
+          </a:p>
+          <a:p>
+            <a:pPr algn="l">
+              <a:spcBef>
+                <a:spcPts val="0"/>
+              </a:spcBef>
+              <a:spcAft>
+                <a:spcPts val="800"/>
+              </a:spcAft>
+            </a:pPr>
+            <a:r>
+              <a:rPr sz="1600" b="0" i="0">
+                <a:solidFill>
+                  <a:srgbClr val="1A1A1A"/>
+                </a:solidFill>
+                <a:latin typeface="Arial"/>
+                <a:ea typeface="Arial"/>
+                <a:cs typeface="Arial"/>
+              </a:rPr>
+              <a:t>• Neo4j đã nạp kho thí điểm, PostgreSQL giữ master registry, nguồn và log.</a:t>
+            </a:r>
+          </a:p>
+          <a:p>
+            <a:pPr algn="l">
+              <a:spcBef>
+                <a:spcPts val="0"/>
+              </a:spcBef>
+              <a:spcAft>
+                <a:spcPts val="800"/>
+              </a:spcAft>
+            </a:pPr>
+            <a:r>
+              <a:rPr sz="1600" b="0" i="0">
+                <a:solidFill>
+                  <a:srgbClr val="1A1A1A"/>
+                </a:solidFill>
+                <a:latin typeface="Arial"/>
+                <a:ea typeface="Arial"/>
+                <a:cs typeface="Arial"/>
+              </a:rPr>
+              <a:t>• Gold set khoảng 150 đến 200 đoạn sử liệu có nhãn, báo cáo số đo.</a:t>
+            </a:r>
+          </a:p>
+        </p:txBody>
+      </p:sp>
+    </p:spTree>
+  </p:cSld>
+  <p:clrMapOvr>
+    <a:masterClrMapping/>
+  </p:clrMapOvr>
+</p:sld>
+</file>
+
+<file path=ppt/slides/slide21.xml><?xml version="1.0" encoding="utf-8"?>
+<p:sld xmlns:a="http://schemas.openxmlformats.org/drawingml/2006/main" xmlns:p="http://schemas.openxmlformats.org/presentationml/2006/main" xmlns:r="http://schemas.openxmlformats.org/officeDocument/2006/relationships">
+  <p:cSld>
+    <p:spTree>
+      <p:nvGrpSpPr>
+        <p:cNvPr id="1" name=""/>
+        <p:cNvGrpSpPr/>
+        <p:nvPr/>
+      </p:nvGrpSpPr>
+      <p:grpSpPr/>
+      <p:sp>
+        <p:nvSpPr>
+          <p:cNvPr id="2" name="Rectangle 1"/>
+          <p:cNvSpPr/>
+          <p:nvPr/>
+        </p:nvSpPr>
+        <p:spPr>
+          <a:xfrm>
+            <a:off x="0" y="0"/>
+            <a:ext cx="12191695" cy="73152"/>
+          </a:xfrm>
+          <a:prstGeom prst="rect">
+            <a:avLst/>
+          </a:prstGeom>
+          <a:solidFill>
+            <a:srgbClr val="1F3864"/>
+          </a:solidFill>
+          <a:ln>
+            <a:noFill/>
+          </a:ln>
+        </p:spPr>
+        <p:style>
+          <a:lnRef idx="1">
+            <a:schemeClr val="accent1"/>
+          </a:lnRef>
+          <a:fillRef idx="3">
+            <a:schemeClr val="accent1"/>
+          </a:fillRef>
+          <a:effectRef idx="2">
+            <a:schemeClr val="accent1"/>
+          </a:effectRef>
+          <a:fontRef idx="minor">
+            <a:schemeClr val="lt1"/>
+          </a:fontRef>
+        </p:style>
+        <p:txBody>
+          <a:bodyPr rtlCol="0" anchor="ctr"/>
+          <a:lstStyle/>
+          <a:p>
+            <a:pPr algn="ctr"/>
+          </a:p>
+        </p:txBody>
+      </p:sp>
+      <p:sp>
+        <p:nvSpPr>
+          <p:cNvPr id="3" name="TextBox 2"/>
+          <p:cNvSpPr txBox="1"/>
+          <p:nvPr/>
+        </p:nvSpPr>
+        <p:spPr>
+          <a:xfrm>
+            <a:off x="6583680" y="146304"/>
+            <a:ext cx="5166360" cy="292608"/>
+          </a:xfrm>
+          <a:prstGeom prst="rect">
+            <a:avLst/>
+          </a:prstGeom>
+          <a:noFill/>
+        </p:spPr>
+        <p:txBody>
+          <a:bodyPr wrap="square" lIns="0" rIns="0" tIns="0" bIns="0"/>
+          <a:lstStyle/>
+          <a:p>
+            <a:pPr algn="r"/>
+            <a:r>
+              <a:rPr sz="1200" b="0" i="0">
+                <a:solidFill>
+                  <a:srgbClr val="1F3864"/>
+                </a:solidFill>
+                <a:latin typeface="Arial"/>
+                <a:ea typeface="Arial"/>
+                <a:cs typeface="Arial"/>
+              </a:rPr>
+              <a:t>Phần D · Kế hoạch và đánh giá</a:t>
+            </a:r>
+          </a:p>
+        </p:txBody>
+      </p:sp>
+      <p:sp>
+        <p:nvSpPr>
+          <p:cNvPr id="4" name="TextBox 3"/>
+          <p:cNvSpPr txBox="1"/>
+          <p:nvPr/>
+        </p:nvSpPr>
+        <p:spPr>
+          <a:xfrm>
+            <a:off x="438912" y="384048"/>
+            <a:ext cx="11311128" cy="566928"/>
+          </a:xfrm>
+          <a:prstGeom prst="rect">
+            <a:avLst/>
+          </a:prstGeom>
+          <a:noFill/>
+        </p:spPr>
+        <p:txBody>
+          <a:bodyPr wrap="square" lIns="0" rIns="0" tIns="0" bIns="0"/>
+          <a:lstStyle/>
+          <a:p>
+            <a:r>
+              <a:rPr sz="2600" b="1" i="0">
+                <a:solidFill>
+                  <a:srgbClr val="1F3864"/>
+                </a:solidFill>
+                <a:latin typeface="Arial"/>
+                <a:ea typeface="Arial"/>
+                <a:cs typeface="Arial"/>
+              </a:rPr>
+              <a:t>Tóm tắt và hỏi đáp</a:t>
+            </a:r>
+          </a:p>
+        </p:txBody>
+      </p:sp>
+      <p:sp>
+        <p:nvSpPr>
+          <p:cNvPr id="5" name="TextBox 4"/>
+          <p:cNvSpPr txBox="1"/>
+          <p:nvPr/>
+        </p:nvSpPr>
+        <p:spPr>
+          <a:xfrm>
+            <a:off x="438912" y="6446520"/>
+            <a:ext cx="8412480" cy="256032"/>
+          </a:xfrm>
+          <a:prstGeom prst="rect">
+            <a:avLst/>
+          </a:prstGeom>
+          <a:noFill/>
+        </p:spPr>
+        <p:txBody>
+          <a:bodyPr wrap="square" lIns="0" rIns="0" tIns="0" bIns="0"/>
+          <a:lstStyle/>
+          <a:p>
+            <a:r>
+              <a:rPr sz="1100" b="0" i="0">
+                <a:solidFill>
+                  <a:srgbClr val="5B6470"/>
+                </a:solidFill>
+                <a:latin typeface="Arial"/>
+                <a:ea typeface="Arial"/>
+                <a:cs typeface="Arial"/>
+              </a:rPr>
+              <a:t>Trần Việt Hoàng · Proposal đồ án</a:t>
+            </a:r>
+          </a:p>
+        </p:txBody>
+      </p:sp>
+      <p:sp>
+        <p:nvSpPr>
+          <p:cNvPr id="6" name="TextBox 5"/>
+          <p:cNvSpPr txBox="1"/>
+          <p:nvPr/>
+        </p:nvSpPr>
+        <p:spPr>
+          <a:xfrm>
+            <a:off x="10424160" y="6446520"/>
+            <a:ext cx="1325880" cy="256032"/>
+          </a:xfrm>
+          <a:prstGeom prst="rect">
+            <a:avLst/>
+          </a:prstGeom>
+          <a:noFill/>
+        </p:spPr>
+        <p:txBody>
+          <a:bodyPr wrap="square" lIns="0" rIns="0" tIns="0" bIns="0"/>
+          <a:lstStyle/>
+          <a:p>
+            <a:pPr algn="r"/>
+            <a:r>
+              <a:rPr sz="1100" b="0" i="0">
+                <a:solidFill>
+                  <a:srgbClr val="5B6470"/>
+                </a:solidFill>
+                <a:latin typeface="Arial"/>
+                <a:ea typeface="Arial"/>
+                <a:cs typeface="Arial"/>
+              </a:rPr>
+              <a:t>21 / 21</a:t>
+            </a:r>
+          </a:p>
+        </p:txBody>
+      </p:sp>
+      <p:sp>
+        <p:nvSpPr>
+          <p:cNvPr id="7" name="TextBox 6"/>
+          <p:cNvSpPr txBox="1"/>
+          <p:nvPr/>
+        </p:nvSpPr>
+        <p:spPr>
+          <a:xfrm>
+            <a:off x="438912" y="1024128"/>
+            <a:ext cx="11311128" cy="2144268"/>
+          </a:xfrm>
+          <a:prstGeom prst="rect">
+            <a:avLst/>
+          </a:prstGeom>
+          <a:noFill/>
+        </p:spPr>
+        <p:txBody>
+          <a:bodyPr wrap="square" lIns="0" rIns="0" tIns="0" bIns="0"/>
+          <a:lstStyle/>
+          <a:p>
+            <a:pPr algn="l">
+              <a:spcBef>
+                <a:spcPts val="0"/>
+              </a:spcBef>
+              <a:spcAft>
+                <a:spcPts val="800"/>
+              </a:spcAft>
+            </a:pPr>
+            <a:r>
               <a:rPr sz="1800" b="0" i="0">
                 <a:solidFill>
                   <a:srgbClr val="1A1A1A"/>
@@ -11105,7 +11611,49 @@
                 <a:ea typeface="Arial"/>
                 <a:cs typeface="Arial"/>
               </a:rPr>
-              <a:t>• Đóng góp: một mạng lưới thực thể dẫn được về nguồn, dựa trên hệ thống chủ thể và từ khóa, làm nền cho các giai đoạn sau của dự án.</a:t>
+              <a:t>• Dự án: kho sử liệu có dẫn nguồn, để người học hỏi và kiểm nguồn.</a:t>
+            </a:r>
+          </a:p>
+          <a:p>
+            <a:pPr algn="l">
+              <a:spcBef>
+                <a:spcPts val="0"/>
+              </a:spcBef>
+              <a:spcAft>
+                <a:spcPts val="800"/>
+              </a:spcAft>
+            </a:pPr>
+            <a:r>
+              <a:rPr sz="1800" b="0" i="0">
+                <a:solidFill>
+                  <a:srgbClr val="1A1A1A"/>
+                </a:solidFill>
+                <a:latin typeface="Arial"/>
+                <a:ea typeface="Arial"/>
+                <a:cs typeface="Arial"/>
+              </a:rPr>
+              <a:t>• Đồ án: phần mở đầu, trích xuất văn bản sử thành bản ghi chủ thể và quan hệ, khử trùng lặp danh xưng, nạp vào knowledge graph, có số đo.</a:t>
+            </a:r>
+          </a:p>
+          <a:p>
+            <a:pPr algn="l">
+              <a:spcBef>
+                <a:spcPts val="0"/>
+              </a:spcBef>
+              <a:spcAft>
+                <a:spcPts val="800"/>
+              </a:spcAft>
+            </a:pPr>
+            <a:r>
+              <a:rPr sz="1800" b="0" i="0">
+                <a:solidFill>
+                  <a:srgbClr val="1A1A1A"/>
+                </a:solidFill>
+                <a:latin typeface="Arial"/>
+                <a:ea typeface="Arial"/>
+                <a:cs typeface="Arial"/>
+              </a:rPr>
+              <a:t>• Đóng góp: lưu nhiều đoạn sử liệu trên cùng một chủ thể, và không nhận câu LLM thêm ra khi không có đoạn trích.</a:t>
             </a:r>
           </a:p>
           <a:p>
@@ -11325,7 +11873,7 @@
                 <a:ea typeface="Arial"/>
                 <a:cs typeface="Arial"/>
               </a:rPr>
-              <a:t>3 / 20</a:t>
+              <a:t>3 / 21</a:t>
             </a:r>
           </a:p>
         </p:txBody>
@@ -11339,7 +11887,7 @@
         <p:spPr>
           <a:xfrm>
             <a:off x="438912" y="1024128"/>
-            <a:ext cx="11311128" cy="1737360"/>
+            <a:ext cx="11311128" cy="2084832"/>
           </a:xfrm>
           <a:prstGeom prst="rect">
             <a:avLst/>
@@ -11367,7 +11915,7 @@
                 <a:ea typeface="Arial"/>
                 <a:cs typeface="Arial"/>
               </a:rPr>
-              <a:t>• Phiếu và sơ đồ trên lớp nằm lại trong vở, không dùng lại được, không đo được độ bám nguồn.</a:t>
+              <a:t>• Bài giảng lịch sử nằm lại trong vở, khó dùng lại, không đo được độ bám nguồn.</a:t>
             </a:r>
           </a:p>
           <a:p>
@@ -11452,6 +12000,27 @@
                 <a:cs typeface="Arial"/>
               </a:rPr>
               <a:t>• Hai bộ sử có thể kể khác nhau về cùng một trận.</a:t>
+            </a:r>
+          </a:p>
+          <a:p>
+            <a:pPr algn="l">
+              <a:spcBef>
+                <a:spcPts val="0"/>
+              </a:spcBef>
+              <a:spcAft>
+                <a:spcPts val="800"/>
+              </a:spcAft>
+            </a:pPr>
+            <a:r>
+              <a:rPr sz="1600" b="0" i="0">
+                <a:solidFill>
+                  <a:srgbClr val="1A1A1A"/>
+                </a:solidFill>
+                <a:latin typeface="Arial"/>
+                <a:ea typeface="Arial"/>
+                <a:cs typeface="Arial"/>
+              </a:rPr>
+              <a:t>• Thực tiễn cần một hệ thống giải quyết các vấn đề này.</a:t>
             </a:r>
           </a:p>
         </p:txBody>
@@ -11650,7 +12219,7 @@
                 <a:ea typeface="Arial"/>
                 <a:cs typeface="Arial"/>
               </a:rPr>
-              <a:t>4 / 20</a:t>
+              <a:t>4 / 21</a:t>
             </a:r>
           </a:p>
         </p:txBody>
@@ -11975,7 +12544,7 @@
                 <a:ea typeface="Arial"/>
                 <a:cs typeface="Arial"/>
               </a:rPr>
-              <a:t>5 / 20</a:t>
+              <a:t>5 / 21</a:t>
             </a:r>
           </a:p>
         </p:txBody>
@@ -12673,7 +13242,7 @@
                 <a:ea typeface="Arial"/>
                 <a:cs typeface="Arial"/>
               </a:rPr>
-              <a:t>6 / 20</a:t>
+              <a:t>6 / 21</a:t>
             </a:r>
           </a:p>
         </p:txBody>
@@ -12749,7 +13318,7 @@
                 <a:ea typeface="Arial"/>
                 <a:cs typeface="Arial"/>
               </a:rPr>
-              <a:t>• Nhận văn bản tiếng Việt đã có chữ sẵn.</a:t>
+              <a:t>• Nhận đầu vào là văn bản sử liệu tiếng Việt.</a:t>
             </a:r>
           </a:p>
           <a:p>
@@ -12812,7 +13381,7 @@
                 <a:ea typeface="Arial"/>
                 <a:cs typeface="Arial"/>
               </a:rPr>
-              <a:t>• Kho thí điểm: kháng chiến chống quân Mông - Nguyên, mạch chính là trận Bạch Đằng 1288.</a:t>
+              <a:t>• Kho thí điểm: sử liệu đã gắn nhãn về một sự kiện lịch sử, lấy từ nhiều nguồn.</a:t>
             </a:r>
           </a:p>
           <a:p>
@@ -13192,7 +13761,7 @@
                 <a:ea typeface="Arial"/>
                 <a:cs typeface="Arial"/>
               </a:rPr>
-              <a:t>7 / 20</a:t>
+              <a:t>7 / 21</a:t>
             </a:r>
           </a:p>
         </p:txBody>
@@ -13517,7 +14086,7 @@
                 <a:ea typeface="Arial"/>
                 <a:cs typeface="Arial"/>
               </a:rPr>
-              <a:t>8 / 20</a:t>
+              <a:t>8 / 21</a:t>
             </a:r>
           </a:p>
         </p:txBody>
@@ -13842,7 +14411,7 @@
                 <a:ea typeface="Arial"/>
                 <a:cs typeface="Arial"/>
               </a:rPr>
-              <a:t>9 / 20</a:t>
+              <a:t>9 / 21</a:t>
             </a:r>
           </a:p>
         </p:txBody>

--- a/Do An/slide-bao-cao-proposal.pptx
+++ b/Do An/slide-bao-cao-proposal.pptx
@@ -3844,7 +3844,7 @@
                 <a:ea typeface="Arial"/>
                 <a:cs typeface="Arial"/>
               </a:rPr>
-              <a:t>Triển khai hệ thống CSDL đồ thị tri thức và thiết kế pipeline trích xuất mạng lưới thực thể lịch sử 5W1H bằng LLM</a:t>
+              <a:t>Khung tích hợp CSDL lai và Pipeline LLM trong mô hình hóa tri thức lịch sử Việt Nam theo phương pháp 5W1H</a:t>
             </a:r>
           </a:p>
         </p:txBody>
@@ -3878,7 +3878,7 @@
                 <a:ea typeface="Arial"/>
                 <a:cs typeface="Arial"/>
               </a:rPr>
-              <a:t>Implementing a Knowledge Graph Database System and Designing an LLM Pipeline to Extract a 5W1H Network of Historical Entities</a:t>
+              <a:t>An Integrated Framework Combining Hybrid Databases and LLM Pipelines for 5W1H Vietnamese Historical Knowledge Modeling</a:t>
             </a:r>
           </a:p>
         </p:txBody>
